--- a/docs/Slide11_lowcost_relaxation.pptx
+++ b/docs/Slide11_lowcost_relaxation.pptx
@@ -1430,7 +1430,7 @@
                 <a:ea typeface="Arial"/>
                 <a:cs typeface="Arial"/>
               </a:rPr>
-              <a:t>Step 3: A machine-learned potential screens structures before DFT</a:t>
+              <a:t>Step 3: Machine-learned potential screening before DFT</a:t>
             </a:r>
           </a:p>
         </p:txBody>
@@ -1546,7 +1546,7 @@
                 <a:ea typeface="Arial"/>
                 <a:cs typeface="Arial"/>
               </a:rPr>
-              <a:t>Thousands of structures had to be relaxed, so a </a:t>
+              <a:t>To relax 3,615 structures within budget, a </a:t>
             </a:r>
             <a:r>
               <a:rPr sz="1275" b="1">
@@ -1568,7 +1568,7 @@
                 <a:ea typeface="Arial"/>
                 <a:cs typeface="Arial"/>
               </a:rPr>
-              <a:t> did it, not DFT.</a:t>
+              <a:t> was used.</a:t>
             </a:r>
           </a:p>
         </p:txBody>
@@ -1684,7 +1684,7 @@
                 <a:ea typeface="Arial"/>
                 <a:cs typeface="Arial"/>
               </a:rPr>
-              <a:t>The gate is </a:t>
+              <a:t>Structures were removed by </a:t>
             </a:r>
             <a:r>
               <a:rPr sz="1275" b="1">
@@ -1695,7 +1695,7 @@
                 <a:ea typeface="Arial"/>
                 <a:cs typeface="Arial"/>
               </a:rPr>
-              <a:t>geometry, not energy</a:t>
+              <a:t>geometry, not by energy</a:t>
             </a:r>
             <a:r>
               <a:rPr sz="1275" b="0">
@@ -1706,7 +1706,7 @@
                 <a:ea typeface="Arial"/>
                 <a:cs typeface="Arial"/>
               </a:rPr>
-              <a:t> — an energy cut would have kept every structure we dropped.</a:t>
+              <a:t>; an energy cut would have kept all 100.</a:t>
             </a:r>
           </a:p>
         </p:txBody>
@@ -1998,7 +1998,7 @@
                 </a:solidFill>
                 <a:latin typeface="Arial"/>
               </a:rPr>
-              <a:t>100 of 3,615 collapsed past 25 %</a:t>
+              <a:t>100 of 3,615 moved past 25 %</a:t>
             </a:r>
             <a:r>
               <a:rPr sz="1150" b="0">
@@ -2007,7 +2007,7 @@
                 </a:solidFill>
                 <a:latin typeface="Arial"/>
               </a:rPr>
-              <a:t> — and they are not the high-energy ones</a:t>
+              <a:t>; an energy cut of the same size overlaps with none of them.</a:t>
             </a:r>
           </a:p>
         </p:txBody>

--- a/docs/Slide11_lowcost_relaxation.pptx
+++ b/docs/Slide11_lowcost_relaxation.pptx
@@ -1706,7 +1706,7 @@
                 <a:ea typeface="Arial"/>
                 <a:cs typeface="Arial"/>
               </a:rPr>
-              <a:t>; an energy cut would have kept all 100.</a:t>
+              <a:t>.</a:t>
             </a:r>
           </a:p>
         </p:txBody>
@@ -1887,14 +1887,14 @@
       </p:sp>
       <p:pic xmlns:a="http://schemas.openxmlformats.org/drawingml/2006/main" xmlns:r="http://schemas.openxmlformats.org/officeDocument/2006/relationships">
         <p:nvPicPr>
-          <p:cNvPr id="39" name="Picture 38" descr="image.png"/>
+          <p:cNvPr id="39" name="Picture 38" descr="step3_survival.png"/>
           <p:cNvPicPr>
             <a:picLocks noChangeAspect="1"/>
           </p:cNvPicPr>
           <p:nvPr/>
         </p:nvPicPr>
         <p:blipFill>
-          <a:blip r:embed="rId3"/>
+          <a:blip r:embed="rId4"/>
           <a:stretch>
             <a:fillRect/>
           </a:stretch>
@@ -1918,7 +1918,7 @@
           <p:nvPr/>
         </p:nvPicPr>
         <p:blipFill>
-          <a:blip r:embed="rId4"/>
+          <a:blip r:embed="rId5"/>
           <a:stretch>
             <a:fillRect/>
           </a:stretch>
@@ -1998,7 +1998,7 @@
                 </a:solidFill>
                 <a:latin typeface="Arial"/>
               </a:rPr>
-              <a:t>100 of 3,615 moved past 25 %</a:t>
+              <a:t>100 of 3,615 changed by more than 25 %</a:t>
             </a:r>
             <a:r>
               <a:rPr sz="1150" b="0">
@@ -2007,7 +2007,7 @@
                 </a:solidFill>
                 <a:latin typeface="Arial"/>
               </a:rPr>
-              <a:t>; an energy cut of the same size overlaps with none of them.</a:t>
+              <a:t>; by energy they look ordinary.</a:t>
             </a:r>
           </a:p>
         </p:txBody>

--- a/docs/Slide11_lowcost_relaxation.pptx
+++ b/docs/Slide11_lowcost_relaxation.pptx
@@ -2007,7 +2007,7 @@
                 </a:solidFill>
                 <a:latin typeface="Arial"/>
               </a:rPr>
-              <a:t>; by energy they look ordinary.</a:t>
+              <a:t>; their energies look like the rest.</a:t>
             </a:r>
           </a:p>
         </p:txBody>

--- a/docs/Slide11_lowcost_relaxation.pptx
+++ b/docs/Slide11_lowcost_relaxation.pptx
@@ -1925,8 +1925,8 @@
         </p:blipFill>
         <p:spPr>
           <a:xfrm>
-            <a:off x="4672583" y="2555749"/>
-            <a:ext cx="3968496" cy="2350004"/>
+            <a:off x="4672583" y="2499038"/>
+            <a:ext cx="3968496" cy="2463426"/>
           </a:xfrm>
           <a:prstGeom prst="rect">
             <a:avLst/>
